--- a/public/fun/cards/finance/finance-34.pptx
+++ b/public/fun/cards/finance/finance-34.pptx
@@ -3085,7 +3085,7 @@
     <p:bg>
       <p:bgPr>
         <a:solidFill>
-          <a:srgbClr val="59472C"/>
+          <a:srgbClr val="0E1116"/>
         </a:solidFill>
         <a:effectLst/>
       </p:bgPr>
@@ -3105,8 +3105,8 @@
         </p:nvSpPr>
         <p:spPr>
           <a:xfrm>
-            <a:off x="1944000" y="540000"/>
-            <a:ext cx="1296000" cy="1260000"/>
+            <a:off x="0" y="180000"/>
+            <a:ext cx="720000" cy="1440000"/>
           </a:xfrm>
           <a:custGeom>
             <a:avLst/>
@@ -3115,22 +3115,106 @@
             <a:cxnLst/>
             <a:rect l="l" t="t" r="r" b="b"/>
             <a:pathLst>
-              <a:path w="1296000" h="1260000">
+              <a:path w="720000" h="1440000">
                 <a:moveTo>
-                  <a:pt x="1296000" y="1260000"/>
+                  <a:pt x="0" y="0"/>
                 </a:moveTo>
                 <a:lnTo>
-                  <a:pt x="1296000" y="0"/>
-                </a:lnTo>
-                <a:lnTo>
-                  <a:pt x="0" y="1260000"/>
+                  <a:pt x="75260" y="3944"/>
+                </a:lnTo>
+                <a:lnTo>
+                  <a:pt x="149696" y="15734"/>
+                </a:lnTo>
+                <a:lnTo>
+                  <a:pt x="222492" y="35239"/>
+                </a:lnTo>
+                <a:lnTo>
+                  <a:pt x="292850" y="62247"/>
+                </a:lnTo>
+                <a:lnTo>
+                  <a:pt x="360000" y="96462"/>
+                </a:lnTo>
+                <a:lnTo>
+                  <a:pt x="423205" y="137508"/>
+                </a:lnTo>
+                <a:lnTo>
+                  <a:pt x="481774" y="184936"/>
+                </a:lnTo>
+                <a:lnTo>
+                  <a:pt x="535064" y="238226"/>
+                </a:lnTo>
+                <a:lnTo>
+                  <a:pt x="582492" y="296795"/>
+                </a:lnTo>
+                <a:lnTo>
+                  <a:pt x="623538" y="360000"/>
+                </a:lnTo>
+                <a:lnTo>
+                  <a:pt x="657753" y="427150"/>
+                </a:lnTo>
+                <a:lnTo>
+                  <a:pt x="684761" y="497508"/>
+                </a:lnTo>
+                <a:lnTo>
+                  <a:pt x="704266" y="570304"/>
+                </a:lnTo>
+                <a:lnTo>
+                  <a:pt x="716056" y="644740"/>
+                </a:lnTo>
+                <a:lnTo>
+                  <a:pt x="720000" y="720000"/>
+                </a:lnTo>
+                <a:lnTo>
+                  <a:pt x="716056" y="795260"/>
+                </a:lnTo>
+                <a:lnTo>
+                  <a:pt x="704266" y="869696"/>
+                </a:lnTo>
+                <a:lnTo>
+                  <a:pt x="684761" y="942492"/>
+                </a:lnTo>
+                <a:lnTo>
+                  <a:pt x="657753" y="1012850"/>
+                </a:lnTo>
+                <a:lnTo>
+                  <a:pt x="623538" y="1080000"/>
+                </a:lnTo>
+                <a:lnTo>
+                  <a:pt x="582492" y="1143205"/>
+                </a:lnTo>
+                <a:lnTo>
+                  <a:pt x="535064" y="1201774"/>
+                </a:lnTo>
+                <a:lnTo>
+                  <a:pt x="481774" y="1255064"/>
+                </a:lnTo>
+                <a:lnTo>
+                  <a:pt x="423205" y="1302492"/>
+                </a:lnTo>
+                <a:lnTo>
+                  <a:pt x="360000" y="1343538"/>
+                </a:lnTo>
+                <a:lnTo>
+                  <a:pt x="292850" y="1377753"/>
+                </a:lnTo>
+                <a:lnTo>
+                  <a:pt x="222492" y="1404761"/>
+                </a:lnTo>
+                <a:lnTo>
+                  <a:pt x="149696" y="1424266"/>
+                </a:lnTo>
+                <a:lnTo>
+                  <a:pt x="75260" y="1436056"/>
+                </a:lnTo>
+                <a:lnTo>
+                  <a:pt x="0" y="1440000"/>
                 </a:lnTo>
                 <a:close/>
               </a:path>
             </a:pathLst>
           </a:custGeom>
           <a:solidFill>
-            <a:srgbClr val="B8A17F"/>
+            <a:srgbClr val="6F6FFF"/>
           </a:solidFill>
           <a:ln>
             <a:noFill/>
@@ -3146,155 +3230,14 @@
       </p:sp>
       <p:sp>
         <p:nvSpPr>
-          <p:cNvPr id="3" name="Freeform 2"/>
-          <p:cNvSpPr/>
+          <p:cNvPr id="3" name="텍스트"/>
+          <p:cNvSpPr txBox="1"/>
           <p:nvPr/>
         </p:nvSpPr>
         <p:spPr>
           <a:xfrm>
-            <a:off x="2520000" y="1080000"/>
-            <a:ext cx="720000" cy="720000"/>
-          </a:xfrm>
-          <a:custGeom>
-            <a:avLst/>
-            <a:gdLst/>
-            <a:ahLst/>
-            <a:cxnLst/>
-            <a:rect l="l" t="t" r="r" b="b"/>
-            <a:pathLst>
-              <a:path w="720000" h="720000">
-                <a:moveTo>
-                  <a:pt x="720000" y="720000"/>
-                </a:moveTo>
-                <a:lnTo>
-                  <a:pt x="720000" y="0"/>
-                </a:lnTo>
-                <a:lnTo>
-                  <a:pt x="0" y="720000"/>
-                </a:lnTo>
-                <a:close/>
-              </a:path>
-            </a:pathLst>
-          </a:custGeom>
-          <a:solidFill>
-            <a:srgbClr val="74644E">
-              <a:alpha val="90000"/>
-            </a:srgbClr>
-          </a:solidFill>
-          <a:ln>
-            <a:noFill/>
-          </a:ln>
-        </p:spPr>
-        <p:txBody>
-          <a:bodyPr rtlCol="0" anchor="ctr"/>
-          <a:lstStyle/>
-          <a:p>
-            <a:pPr algn="ctr"/>
-          </a:p>
-        </p:txBody>
-      </p:sp>
-      <p:sp>
-        <p:nvSpPr>
-          <p:cNvPr id="4" name="Oval 3"/>
-          <p:cNvSpPr/>
-          <p:nvPr/>
-        </p:nvSpPr>
-        <p:spPr>
-          <a:xfrm>
-            <a:off x="2834784" y="1406736"/>
-            <a:ext cx="106560" cy="106560"/>
-          </a:xfrm>
-          <a:prstGeom prst="ellipse">
-            <a:avLst/>
-          </a:prstGeom>
-          <a:noFill/>
-          <a:ln w="23976">
-            <a:solidFill>
-              <a:srgbClr val="FFFFFF"/>
-            </a:solidFill>
-          </a:ln>
-        </p:spPr>
-        <p:txBody>
-          <a:bodyPr rtlCol="0" anchor="ctr"/>
-          <a:lstStyle/>
-          <a:p>
-            <a:pPr algn="ctr"/>
-          </a:p>
-        </p:txBody>
-      </p:sp>
-      <p:cxnSp>
-        <p:nvCxnSpPr>
-          <p:cNvPr id="5" name="Connector 4"/>
-          <p:cNvCxnSpPr/>
-          <p:nvPr/>
-        </p:nvCxnSpPr>
-        <p:spPr>
-          <a:xfrm>
-            <a:off x="2936016" y="1460016"/>
-            <a:ext cx="133200" cy="0"/>
-          </a:xfrm>
-          <a:prstGeom prst="line">
-            <a:avLst/>
-          </a:prstGeom>
-          <a:ln w="23976">
-            <a:solidFill>
-              <a:srgbClr val="FFFFFF"/>
-            </a:solidFill>
-          </a:ln>
-        </p:spPr>
-      </p:cxnSp>
-      <p:cxnSp>
-        <p:nvCxnSpPr>
-          <p:cNvPr id="6" name="Connector 5"/>
-          <p:cNvCxnSpPr/>
-          <p:nvPr/>
-        </p:nvCxnSpPr>
-        <p:spPr>
-          <a:xfrm>
-            <a:off x="3031920" y="1460016"/>
-            <a:ext cx="0" cy="47952"/>
-          </a:xfrm>
-          <a:prstGeom prst="line">
-            <a:avLst/>
-          </a:prstGeom>
-          <a:ln w="21312">
-            <a:solidFill>
-              <a:srgbClr val="FFFFFF"/>
-            </a:solidFill>
-          </a:ln>
-        </p:spPr>
-      </p:cxnSp>
-      <p:cxnSp>
-        <p:nvCxnSpPr>
-          <p:cNvPr id="7" name="Connector 6"/>
-          <p:cNvCxnSpPr/>
-          <p:nvPr/>
-        </p:nvCxnSpPr>
-        <p:spPr>
-          <a:xfrm>
-            <a:off x="3069216" y="1460016"/>
-            <a:ext cx="0" cy="58608"/>
-          </a:xfrm>
-          <a:prstGeom prst="line">
-            <a:avLst/>
-          </a:prstGeom>
-          <a:ln w="21312">
-            <a:solidFill>
-              <a:srgbClr val="FFFFFF"/>
-            </a:solidFill>
-          </a:ln>
-        </p:spPr>
-      </p:cxnSp>
-      <p:sp>
-        <p:nvSpPr>
-          <p:cNvPr id="8" name="텍스트"/>
-          <p:cNvSpPr txBox="1"/>
-          <p:nvPr/>
-        </p:nvSpPr>
-        <p:spPr>
-          <a:xfrm>
-            <a:off x="252000" y="201600"/>
-            <a:ext cx="1800000" cy="100800"/>
+            <a:off x="36000" y="540000"/>
+            <a:ext cx="540000" cy="720000"/>
           </a:xfrm>
           <a:prstGeom prst="rect">
             <a:avLst/>
@@ -3302,39 +3245,39 @@
           <a:noFill/>
         </p:spPr>
         <p:txBody>
-          <a:bodyPr wrap="square" lIns="0" rIns="0" tIns="0" bIns="0" anchor="t">
+          <a:bodyPr wrap="square" lIns="0" rIns="0" tIns="0" bIns="0" anchor="ctr">
             <a:spAutoFit/>
           </a:bodyPr>
           <a:lstStyle/>
           <a:p>
-            <a:pPr algn="l">
+            <a:pPr algn="ctr">
               <a:lnSpc>
-                <a:spcPts val="1087"/>
+                <a:spcPts val="4350"/>
               </a:lnSpc>
             </a:pPr>
             <a:r>
-              <a:rPr sz="750" b="1" spc="150">
+              <a:rPr sz="3000" b="1">
                 <a:solidFill>
-                  <a:srgbClr val="C5BFB5"/>
+                  <a:srgbClr val="FFFFFF"/>
                 </a:solidFill>
                 <a:latin typeface="맑은 고딕"/>
                 <a:ea typeface="맑은 고딕"/>
               </a:rPr>
-              <a:t>회사 · 사무소 이름</a:t>
-            </a:r>
-          </a:p>
-        </p:txBody>
-      </p:sp>
-      <p:sp>
-        <p:nvSpPr>
-          <p:cNvPr id="9" name="텍스트"/>
+              <a:t>맹</a:t>
+            </a:r>
+          </a:p>
+        </p:txBody>
+      </p:sp>
+      <p:sp>
+        <p:nvSpPr>
+          <p:cNvPr id="4" name="텍스트"/>
           <p:cNvSpPr txBox="1"/>
           <p:nvPr/>
         </p:nvSpPr>
         <p:spPr>
           <a:xfrm>
-            <a:off x="252000" y="360000"/>
-            <a:ext cx="2016000" cy="313692"/>
+            <a:off x="1116000" y="223200"/>
+            <a:ext cx="1872000" cy="133351"/>
           </a:xfrm>
           <a:prstGeom prst="rect">
             <a:avLst/>
@@ -3349,32 +3292,32 @@
           <a:p>
             <a:pPr algn="l">
               <a:lnSpc>
-                <a:spcPts val="2755"/>
+                <a:spcPts val="1015"/>
               </a:lnSpc>
             </a:pPr>
             <a:r>
-              <a:rPr sz="1900" b="1" spc="50">
+              <a:rPr sz="700" b="1" spc="200">
                 <a:solidFill>
-                  <a:srgbClr val="FFFFFF"/>
+                  <a:srgbClr val="A3A9B5"/>
                 </a:solidFill>
-                <a:latin typeface="바탕"/>
-                <a:ea typeface="바탕"/>
+                <a:latin typeface="맑은 고딕"/>
+                <a:ea typeface="맑은 고딕"/>
               </a:rPr>
-              <a:t>맹우빈</a:t>
-            </a:r>
-          </a:p>
-        </p:txBody>
-      </p:sp>
-      <p:sp>
-        <p:nvSpPr>
-          <p:cNvPr id="10" name="텍스트"/>
+              <a:t>회사 · 사무소 이름</a:t>
+            </a:r>
+          </a:p>
+        </p:txBody>
+      </p:sp>
+      <p:sp>
+        <p:nvSpPr>
+          <p:cNvPr id="5" name="텍스트"/>
           <p:cNvSpPr txBox="1"/>
           <p:nvPr/>
         </p:nvSpPr>
         <p:spPr>
           <a:xfrm>
-            <a:off x="252000" y="655200"/>
-            <a:ext cx="1872000" cy="122400"/>
+            <a:off x="1116000" y="540000"/>
+            <a:ext cx="1872000" cy="360000"/>
           </a:xfrm>
           <a:prstGeom prst="rect">
             <a:avLst/>
@@ -3389,61 +3332,32 @@
           <a:p>
             <a:pPr algn="l">
               <a:lnSpc>
-                <a:spcPts val="1232"/>
+                <a:spcPts val="3190"/>
               </a:lnSpc>
             </a:pPr>
             <a:r>
-              <a:rPr sz="850" b="1">
+              <a:rPr sz="2200" b="1">
                 <a:solidFill>
-                  <a:srgbClr val="CAB89F"/>
+                  <a:srgbClr val="FFFFFF"/>
                 </a:solidFill>
                 <a:latin typeface="맑은 고딕"/>
                 <a:ea typeface="맑은 고딕"/>
               </a:rPr>
-              <a:t>세무사</a:t>
-            </a:r>
-          </a:p>
-        </p:txBody>
-      </p:sp>
-      <p:sp>
-        <p:nvSpPr>
-          <p:cNvPr id="11" name="Rectangle 10"/>
-          <p:cNvSpPr/>
+              <a:t>맹우빈</a:t>
+            </a:r>
+          </a:p>
+        </p:txBody>
+      </p:sp>
+      <p:sp>
+        <p:nvSpPr>
+          <p:cNvPr id="6" name="텍스트"/>
+          <p:cNvSpPr txBox="1"/>
           <p:nvPr/>
         </p:nvSpPr>
         <p:spPr>
           <a:xfrm>
-            <a:off x="252000" y="864000"/>
-            <a:ext cx="230400" cy="14400"/>
-          </a:xfrm>
-          <a:prstGeom prst="rect">
-            <a:avLst/>
-          </a:prstGeom>
-          <a:solidFill>
-            <a:srgbClr val="B8A17F"/>
-          </a:solidFill>
-          <a:ln>
-            <a:noFill/>
-          </a:ln>
-        </p:spPr>
-        <p:txBody>
-          <a:bodyPr rtlCol="0" anchor="ctr"/>
-          <a:lstStyle/>
-          <a:p>
-            <a:pPr algn="ctr"/>
-          </a:p>
-        </p:txBody>
-      </p:sp>
-      <p:sp>
-        <p:nvSpPr>
-          <p:cNvPr id="12" name="텍스트"/>
-          <p:cNvSpPr txBox="1"/>
-          <p:nvPr/>
-        </p:nvSpPr>
-        <p:spPr>
-          <a:xfrm>
-            <a:off x="252000" y="1044000"/>
-            <a:ext cx="122400" cy="168911"/>
+            <a:off x="1116000" y="943200"/>
+            <a:ext cx="1872000" cy="171451"/>
           </a:xfrm>
           <a:prstGeom prst="rect">
             <a:avLst/>
@@ -3458,32 +3372,101 @@
           <a:p>
             <a:pPr algn="l">
               <a:lnSpc>
-                <a:spcPts val="1015"/>
+                <a:spcPts val="1305"/>
               </a:lnSpc>
             </a:pPr>
             <a:r>
-              <a:rPr sz="700" b="1">
+              <a:rPr sz="900" b="0">
                 <a:solidFill>
-                  <a:srgbClr val="CAB89F"/>
+                  <a:srgbClr val="A3A9B5"/>
                 </a:solidFill>
                 <a:latin typeface="맑은 고딕"/>
                 <a:ea typeface="맑은 고딕"/>
               </a:rPr>
-              <a:t>T</a:t>
-            </a:r>
-          </a:p>
-        </p:txBody>
-      </p:sp>
-      <p:sp>
-        <p:nvSpPr>
-          <p:cNvPr id="13" name="텍스트"/>
+              <a:t>세무사</a:t>
+            </a:r>
+          </a:p>
+        </p:txBody>
+      </p:sp>
+      <p:sp>
+        <p:nvSpPr>
+          <p:cNvPr id="7" name="Rectangle 6"/>
+          <p:cNvSpPr/>
+          <p:nvPr/>
+        </p:nvSpPr>
+        <p:spPr>
+          <a:xfrm>
+            <a:off x="1116000" y="1195200"/>
+            <a:ext cx="144000" cy="18000"/>
+          </a:xfrm>
+          <a:prstGeom prst="rect">
+            <a:avLst/>
+          </a:prstGeom>
+          <a:solidFill>
+            <a:srgbClr val="6F6FFF"/>
+          </a:solidFill>
+          <a:ln>
+            <a:noFill/>
+          </a:ln>
+        </p:spPr>
+        <p:txBody>
+          <a:bodyPr rtlCol="0" anchor="ctr"/>
+          <a:lstStyle/>
+          <a:p>
+            <a:pPr algn="ctr"/>
+          </a:p>
+        </p:txBody>
+      </p:sp>
+      <p:sp>
+        <p:nvSpPr>
+          <p:cNvPr id="8" name="텍스트"/>
           <p:cNvSpPr txBox="1"/>
           <p:nvPr/>
         </p:nvSpPr>
         <p:spPr>
           <a:xfrm>
-            <a:off x="396000" y="1044000"/>
-            <a:ext cx="1584000" cy="168911"/>
+            <a:off x="1116000" y="1328400"/>
+            <a:ext cx="331200" cy="99061"/>
+          </a:xfrm>
+          <a:prstGeom prst="rect">
+            <a:avLst/>
+          </a:prstGeom>
+          <a:noFill/>
+        </p:spPr>
+        <p:txBody>
+          <a:bodyPr wrap="square" lIns="0" rIns="0" tIns="0" bIns="0" anchor="t">
+            <a:spAutoFit/>
+          </a:bodyPr>
+          <a:lstStyle/>
+          <a:p>
+            <a:pPr algn="l">
+              <a:lnSpc>
+                <a:spcPts val="754"/>
+              </a:lnSpc>
+            </a:pPr>
+            <a:r>
+              <a:rPr sz="520" b="1" spc="120">
+                <a:solidFill>
+                  <a:srgbClr val="A3A9B5"/>
+                </a:solidFill>
+                <a:latin typeface="맑은 고딕"/>
+                <a:ea typeface="맑은 고딕"/>
+              </a:rPr>
+              <a:t>TEL</a:t>
+            </a:r>
+          </a:p>
+        </p:txBody>
+      </p:sp>
+      <p:sp>
+        <p:nvSpPr>
+          <p:cNvPr id="9" name="텍스트"/>
+          <p:cNvSpPr txBox="1"/>
+          <p:nvPr/>
+        </p:nvSpPr>
+        <p:spPr>
+          <a:xfrm>
+            <a:off x="1447200" y="1317600"/>
+            <a:ext cx="1440000" cy="133351"/>
           </a:xfrm>
           <a:prstGeom prst="rect">
             <a:avLst/>
@@ -3516,14 +3499,14 @@
       </p:sp>
       <p:sp>
         <p:nvSpPr>
-          <p:cNvPr id="14" name="텍스트"/>
+          <p:cNvPr id="10" name="텍스트"/>
           <p:cNvSpPr txBox="1"/>
           <p:nvPr/>
         </p:nvSpPr>
         <p:spPr>
           <a:xfrm>
-            <a:off x="252000" y="1212911"/>
-            <a:ext cx="122400" cy="168911"/>
+            <a:off x="1116000" y="1458000"/>
+            <a:ext cx="331200" cy="99061"/>
           </a:xfrm>
           <a:prstGeom prst="rect">
             <a:avLst/>
@@ -3538,32 +3521,32 @@
           <a:p>
             <a:pPr algn="l">
               <a:lnSpc>
-                <a:spcPts val="1015"/>
+                <a:spcPts val="754"/>
               </a:lnSpc>
             </a:pPr>
             <a:r>
-              <a:rPr sz="700" b="1">
+              <a:rPr sz="520" b="1" spc="120">
                 <a:solidFill>
-                  <a:srgbClr val="CAB89F"/>
+                  <a:srgbClr val="A3A9B5"/>
                 </a:solidFill>
                 <a:latin typeface="맑은 고딕"/>
                 <a:ea typeface="맑은 고딕"/>
               </a:rPr>
-              <a:t>E</a:t>
-            </a:r>
-          </a:p>
-        </p:txBody>
-      </p:sp>
-      <p:sp>
-        <p:nvSpPr>
-          <p:cNvPr id="15" name="텍스트"/>
+              <a:t>MAIL</a:t>
+            </a:r>
+          </a:p>
+        </p:txBody>
+      </p:sp>
+      <p:sp>
+        <p:nvSpPr>
+          <p:cNvPr id="11" name="텍스트"/>
           <p:cNvSpPr txBox="1"/>
           <p:nvPr/>
         </p:nvSpPr>
         <p:spPr>
           <a:xfrm>
-            <a:off x="396000" y="1212911"/>
-            <a:ext cx="1584000" cy="168911"/>
+            <a:off x="1447200" y="1447200"/>
+            <a:ext cx="1440000" cy="133351"/>
           </a:xfrm>
           <a:prstGeom prst="rect">
             <a:avLst/>
@@ -3596,14 +3579,14 @@
       </p:sp>
       <p:sp>
         <p:nvSpPr>
-          <p:cNvPr id="16" name="텍스트"/>
+          <p:cNvPr id="12" name="텍스트"/>
           <p:cNvSpPr txBox="1"/>
           <p:nvPr/>
         </p:nvSpPr>
         <p:spPr>
           <a:xfrm>
-            <a:off x="252000" y="1381822"/>
-            <a:ext cx="122400" cy="168911"/>
+            <a:off x="1116000" y="1587600"/>
+            <a:ext cx="331200" cy="99061"/>
           </a:xfrm>
           <a:prstGeom prst="rect">
             <a:avLst/>
@@ -3618,32 +3601,32 @@
           <a:p>
             <a:pPr algn="l">
               <a:lnSpc>
-                <a:spcPts val="1015"/>
+                <a:spcPts val="754"/>
               </a:lnSpc>
             </a:pPr>
             <a:r>
-              <a:rPr sz="700" b="1">
+              <a:rPr sz="520" b="1" spc="120">
                 <a:solidFill>
-                  <a:srgbClr val="CAB89F"/>
+                  <a:srgbClr val="A3A9B5"/>
                 </a:solidFill>
                 <a:latin typeface="맑은 고딕"/>
                 <a:ea typeface="맑은 고딕"/>
               </a:rPr>
-              <a:t>A</a:t>
-            </a:r>
-          </a:p>
-        </p:txBody>
-      </p:sp>
-      <p:sp>
-        <p:nvSpPr>
-          <p:cNvPr id="17" name="텍스트"/>
+              <a:t>ADDR</a:t>
+            </a:r>
+          </a:p>
+        </p:txBody>
+      </p:sp>
+      <p:sp>
+        <p:nvSpPr>
+          <p:cNvPr id="13" name="텍스트"/>
           <p:cNvSpPr txBox="1"/>
           <p:nvPr/>
         </p:nvSpPr>
         <p:spPr>
           <a:xfrm>
-            <a:off x="396000" y="1381822"/>
-            <a:ext cx="1584000" cy="168911"/>
+            <a:off x="1447200" y="1576800"/>
+            <a:ext cx="1440000" cy="133351"/>
           </a:xfrm>
           <a:prstGeom prst="rect">
             <a:avLst/>
@@ -3688,7 +3671,7 @@
     <p:bg>
       <p:bgPr>
         <a:solidFill>
-          <a:srgbClr val="FBF8F2"/>
+          <a:srgbClr val="5B5BFF"/>
         </a:solidFill>
         <a:effectLst/>
       </p:bgPr>
@@ -3709,13 +3692,13 @@
         <p:spPr>
           <a:xfrm>
             <a:off x="0" y="0"/>
-            <a:ext cx="64800" cy="1800000"/>
+            <a:ext cx="3240000" cy="1800000"/>
           </a:xfrm>
           <a:prstGeom prst="rect">
             <a:avLst/>
           </a:prstGeom>
           <a:solidFill>
-            <a:srgbClr val="438289"/>
+            <a:srgbClr val="7C7CFF"/>
           </a:solidFill>
           <a:ln>
             <a:noFill/>
@@ -3731,14 +3714,130 @@
       </p:sp>
       <p:sp>
         <p:nvSpPr>
-          <p:cNvPr id="3" name="텍스트"/>
+          <p:cNvPr id="3" name="Freeform 2"/>
+          <p:cNvSpPr/>
+          <p:nvPr/>
+        </p:nvSpPr>
+        <p:spPr>
+          <a:xfrm>
+            <a:off x="2412000" y="972000"/>
+            <a:ext cx="828000" cy="828000"/>
+          </a:xfrm>
+          <a:custGeom>
+            <a:avLst/>
+            <a:gdLst/>
+            <a:ahLst/>
+            <a:cxnLst/>
+            <a:rect l="l" t="t" r="r" b="b"/>
+            <a:pathLst>
+              <a:path w="828000" h="828000">
+                <a:moveTo>
+                  <a:pt x="828000" y="828000"/>
+                </a:moveTo>
+                <a:lnTo>
+                  <a:pt x="0" y="828000"/>
+                </a:lnTo>
+                <a:lnTo>
+                  <a:pt x="1773" y="773846"/>
+                </a:lnTo>
+                <a:lnTo>
+                  <a:pt x="7084" y="719924"/>
+                </a:lnTo>
+                <a:lnTo>
+                  <a:pt x="15910" y="666465"/>
+                </a:lnTo>
+                <a:lnTo>
+                  <a:pt x="28213" y="613698"/>
+                </a:lnTo>
+                <a:lnTo>
+                  <a:pt x="43942" y="561848"/>
+                </a:lnTo>
+                <a:lnTo>
+                  <a:pt x="63028" y="511138"/>
+                </a:lnTo>
+                <a:lnTo>
+                  <a:pt x="85389" y="461785"/>
+                </a:lnTo>
+                <a:lnTo>
+                  <a:pt x="110931" y="414000"/>
+                </a:lnTo>
+                <a:lnTo>
+                  <a:pt x="139543" y="367988"/>
+                </a:lnTo>
+                <a:lnTo>
+                  <a:pt x="171103" y="323946"/>
+                </a:lnTo>
+                <a:lnTo>
+                  <a:pt x="205477" y="282062"/>
+                </a:lnTo>
+                <a:lnTo>
+                  <a:pt x="242516" y="242516"/>
+                </a:lnTo>
+                <a:lnTo>
+                  <a:pt x="282062" y="205477"/>
+                </a:lnTo>
+                <a:lnTo>
+                  <a:pt x="323946" y="171103"/>
+                </a:lnTo>
+                <a:lnTo>
+                  <a:pt x="367988" y="139543"/>
+                </a:lnTo>
+                <a:lnTo>
+                  <a:pt x="414000" y="110931"/>
+                </a:lnTo>
+                <a:lnTo>
+                  <a:pt x="461785" y="85389"/>
+                </a:lnTo>
+                <a:lnTo>
+                  <a:pt x="511138" y="63028"/>
+                </a:lnTo>
+                <a:lnTo>
+                  <a:pt x="561848" y="43942"/>
+                </a:lnTo>
+                <a:lnTo>
+                  <a:pt x="613698" y="28213"/>
+                </a:lnTo>
+                <a:lnTo>
+                  <a:pt x="666465" y="15910"/>
+                </a:lnTo>
+                <a:lnTo>
+                  <a:pt x="719924" y="7084"/>
+                </a:lnTo>
+                <a:lnTo>
+                  <a:pt x="773846" y="1773"/>
+                </a:lnTo>
+                <a:lnTo>
+                  <a:pt x="828000" y="0"/>
+                </a:lnTo>
+                <a:close/>
+              </a:path>
+            </a:pathLst>
+          </a:custGeom>
+          <a:solidFill>
+            <a:srgbClr val="9999FF"/>
+          </a:solidFill>
+          <a:ln>
+            <a:noFill/>
+          </a:ln>
+        </p:spPr>
+        <p:txBody>
+          <a:bodyPr rtlCol="0" anchor="ctr"/>
+          <a:lstStyle/>
+          <a:p>
+            <a:pPr algn="ctr"/>
+          </a:p>
+        </p:txBody>
+      </p:sp>
+      <p:sp>
+        <p:nvSpPr>
+          <p:cNvPr id="4" name="텍스트"/>
           <p:cNvSpPr txBox="1"/>
           <p:nvPr/>
         </p:nvSpPr>
         <p:spPr>
           <a:xfrm>
             <a:off x="252000" y="432000"/>
-            <a:ext cx="2016000" cy="252000"/>
+            <a:ext cx="2304000" cy="720000"/>
           </a:xfrm>
           <a:prstGeom prst="rect">
             <a:avLst/>
@@ -3753,32 +3852,32 @@
           <a:p>
             <a:pPr algn="l">
               <a:lnSpc>
-                <a:spcPts val="2465"/>
+                <a:spcPts val="1884"/>
               </a:lnSpc>
             </a:pPr>
             <a:r>
-              <a:rPr sz="1700" b="1">
+              <a:rPr sz="1300" b="1">
                 <a:solidFill>
-                  <a:srgbClr val="59472C"/>
+                  <a:srgbClr val="FFFFFF"/>
                 </a:solidFill>
-                <a:latin typeface="바탕"/>
-                <a:ea typeface="바탕"/>
+                <a:latin typeface="맑은 고딕"/>
+                <a:ea typeface="맑은 고딕"/>
               </a:rPr>
-              <a:t>회사 · 사무소 이름</a:t>
-            </a:r>
-          </a:p>
-        </p:txBody>
-      </p:sp>
-      <p:sp>
-        <p:nvSpPr>
-          <p:cNvPr id="4" name="텍스트"/>
+              <a:t>삶의 계획표를 함께 그려요</a:t>
+            </a:r>
+          </a:p>
+        </p:txBody>
+      </p:sp>
+      <p:sp>
+        <p:nvSpPr>
+          <p:cNvPr id="5" name="텍스트"/>
           <p:cNvSpPr txBox="1"/>
           <p:nvPr/>
         </p:nvSpPr>
         <p:spPr>
           <a:xfrm>
-            <a:off x="252000" y="878400"/>
-            <a:ext cx="2016000" cy="540000"/>
+            <a:off x="252000" y="1476000"/>
+            <a:ext cx="1800000" cy="133351"/>
           </a:xfrm>
           <a:prstGeom prst="rect">
             <a:avLst/>
@@ -3793,213 +3892,22 @@
           <a:p>
             <a:pPr algn="l">
               <a:lnSpc>
-                <a:spcPts val="1232"/>
+                <a:spcPts val="1015"/>
               </a:lnSpc>
             </a:pPr>
             <a:r>
-              <a:rPr sz="850" b="0">
+              <a:rPr sz="700" b="1" spc="200">
                 <a:solidFill>
-                  <a:srgbClr val="7C7160"/>
-                </a:solidFill>
-                <a:latin typeface="바탕"/>
-                <a:ea typeface="바탕"/>
-              </a:rPr>
-              <a:t>삶의 계획표를 함께 그려요</a:t>
-            </a:r>
-          </a:p>
-        </p:txBody>
-      </p:sp>
-      <p:sp>
-        <p:nvSpPr>
-          <p:cNvPr id="5" name="Rectangle 4"/>
-          <p:cNvSpPr/>
-          <p:nvPr/>
-        </p:nvSpPr>
-        <p:spPr>
-          <a:xfrm>
-            <a:off x="2520000" y="1080000"/>
-            <a:ext cx="504000" cy="504000"/>
-          </a:xfrm>
-          <a:prstGeom prst="rect">
-            <a:avLst/>
-          </a:prstGeom>
-          <a:noFill/>
-          <a:ln w="9000">
-            <a:solidFill>
-              <a:srgbClr val="438289"/>
-            </a:solidFill>
-            <a:prstDash val="dash"/>
-          </a:ln>
-        </p:spPr>
-        <p:txBody>
-          <a:bodyPr rtlCol="0" anchor="ctr"/>
-          <a:lstStyle/>
-          <a:p>
-            <a:pPr algn="ctr"/>
-          </a:p>
-        </p:txBody>
-      </p:sp>
-      <p:sp>
-        <p:nvSpPr>
-          <p:cNvPr id="6" name="텍스트"/>
-          <p:cNvSpPr txBox="1"/>
-          <p:nvPr/>
-        </p:nvSpPr>
-        <p:spPr>
-          <a:xfrm>
-            <a:off x="2520000" y="1080000"/>
-            <a:ext cx="504000" cy="504000"/>
-          </a:xfrm>
-          <a:prstGeom prst="rect">
-            <a:avLst/>
-          </a:prstGeom>
-          <a:noFill/>
-        </p:spPr>
-        <p:txBody>
-          <a:bodyPr wrap="square" lIns="0" rIns="0" tIns="0" bIns="0" anchor="ctr">
-            <a:spAutoFit/>
-          </a:bodyPr>
-          <a:lstStyle/>
-          <a:p>
-            <a:pPr algn="ctr">
-              <a:lnSpc>
-                <a:spcPts val="1305"/>
-              </a:lnSpc>
-            </a:pPr>
-            <a:r>
-              <a:rPr sz="900" b="1">
-                <a:solidFill>
-                  <a:srgbClr val="7C7160"/>
+                  <a:srgbClr val="FFFFFF"/>
                 </a:solidFill>
                 <a:latin typeface="맑은 고딕"/>
                 <a:ea typeface="맑은 고딕"/>
               </a:rPr>
-              <a:t>QR</a:t>
-            </a:r>
-          </a:p>
-        </p:txBody>
-      </p:sp>
-      <p:sp>
-        <p:nvSpPr>
-          <p:cNvPr id="7" name="Rectangle 6"/>
-          <p:cNvSpPr/>
-          <p:nvPr/>
-        </p:nvSpPr>
-        <p:spPr>
-          <a:xfrm>
-            <a:off x="252000" y="763200"/>
-            <a:ext cx="201600" cy="14400"/>
-          </a:xfrm>
-          <a:prstGeom prst="rect">
-            <a:avLst/>
-          </a:prstGeom>
-          <a:solidFill>
-            <a:srgbClr val="438289"/>
-          </a:solidFill>
-          <a:ln>
-            <a:noFill/>
-          </a:ln>
-        </p:spPr>
-        <p:txBody>
-          <a:bodyPr rtlCol="0" anchor="ctr"/>
-          <a:lstStyle/>
-          <a:p>
-            <a:pPr algn="ctr"/>
-          </a:p>
-        </p:txBody>
-      </p:sp>
-      <p:sp>
-        <p:nvSpPr>
-          <p:cNvPr id="8" name="Oval 7"/>
-          <p:cNvSpPr/>
-          <p:nvPr/>
-        </p:nvSpPr>
-        <p:spPr>
-          <a:xfrm>
-            <a:off x="2629440" y="347760"/>
-            <a:ext cx="129600" cy="129600"/>
-          </a:xfrm>
-          <a:prstGeom prst="ellipse">
-            <a:avLst/>
-          </a:prstGeom>
-          <a:noFill/>
-          <a:ln w="29160">
-            <a:solidFill>
-              <a:srgbClr val="438289"/>
-            </a:solidFill>
-          </a:ln>
-        </p:spPr>
-        <p:txBody>
-          <a:bodyPr rtlCol="0" anchor="ctr"/>
-          <a:lstStyle/>
-          <a:p>
-            <a:pPr algn="ctr"/>
-          </a:p>
-        </p:txBody>
-      </p:sp>
-      <p:cxnSp>
-        <p:nvCxnSpPr>
-          <p:cNvPr id="9" name="Connector 8"/>
-          <p:cNvCxnSpPr/>
-          <p:nvPr/>
-        </p:nvCxnSpPr>
-        <p:spPr>
-          <a:xfrm>
-            <a:off x="2752560" y="412560"/>
-            <a:ext cx="162000" cy="0"/>
-          </a:xfrm>
-          <a:prstGeom prst="line">
-            <a:avLst/>
-          </a:prstGeom>
-          <a:ln w="29160">
-            <a:solidFill>
-              <a:srgbClr val="438289"/>
-            </a:solidFill>
-          </a:ln>
-        </p:spPr>
-      </p:cxnSp>
-      <p:cxnSp>
-        <p:nvCxnSpPr>
-          <p:cNvPr id="10" name="Connector 9"/>
-          <p:cNvCxnSpPr/>
-          <p:nvPr/>
-        </p:nvCxnSpPr>
-        <p:spPr>
-          <a:xfrm>
-            <a:off x="2869200" y="412560"/>
-            <a:ext cx="0" cy="58320"/>
-          </a:xfrm>
-          <a:prstGeom prst="line">
-            <a:avLst/>
-          </a:prstGeom>
-          <a:ln w="25920">
-            <a:solidFill>
-              <a:srgbClr val="CADCDE"/>
-            </a:solidFill>
-          </a:ln>
-        </p:spPr>
-      </p:cxnSp>
-      <p:cxnSp>
-        <p:nvCxnSpPr>
-          <p:cNvPr id="11" name="Connector 10"/>
-          <p:cNvCxnSpPr/>
-          <p:nvPr/>
-        </p:nvCxnSpPr>
-        <p:spPr>
-          <a:xfrm>
-            <a:off x="2914560" y="412560"/>
-            <a:ext cx="0" cy="71280"/>
-          </a:xfrm>
-          <a:prstGeom prst="line">
-            <a:avLst/>
-          </a:prstGeom>
-          <a:ln w="25920">
-            <a:solidFill>
-              <a:srgbClr val="CADCDE"/>
-            </a:solidFill>
-          </a:ln>
-        </p:spPr>
-      </p:cxnSp>
+              <a:t>회사 · 사무소 이름</a:t>
+            </a:r>
+          </a:p>
+        </p:txBody>
+      </p:sp>
     </p:spTree>
   </p:cSld>
   <p:clrMapOvr>

--- a/public/fun/cards/finance/finance-34.pptx
+++ b/public/fun/cards/finance/finance-34.pptx
@@ -3105,8 +3105,8 @@
         </p:nvSpPr>
         <p:spPr>
           <a:xfrm>
-            <a:off x="0" y="180000"/>
-            <a:ext cx="720000" cy="1440000"/>
+            <a:off x="0" y="216000"/>
+            <a:ext cx="684000" cy="1368000"/>
           </a:xfrm>
           <a:custGeom>
             <a:avLst/>
@@ -3115,99 +3115,99 @@
             <a:cxnLst/>
             <a:rect l="l" t="t" r="r" b="b"/>
             <a:pathLst>
-              <a:path w="720000" h="1440000">
+              <a:path w="684000" h="1368000">
                 <a:moveTo>
                   <a:pt x="0" y="0"/>
                 </a:moveTo>
                 <a:lnTo>
-                  <a:pt x="75260" y="3944"/>
+                  <a:pt x="71497" y="3747"/>
                 </a:lnTo>
                 <a:lnTo>
-                  <a:pt x="149696" y="15734"/>
+                  <a:pt x="142212" y="14947"/>
                 </a:lnTo>
                 <a:lnTo>
-                  <a:pt x="222492" y="35239"/>
+                  <a:pt x="211368" y="33477"/>
                 </a:lnTo>
                 <a:lnTo>
-                  <a:pt x="292850" y="62247"/>
+                  <a:pt x="278208" y="59135"/>
                 </a:lnTo>
                 <a:lnTo>
-                  <a:pt x="360000" y="96462"/>
+                  <a:pt x="342000" y="91639"/>
                 </a:lnTo>
                 <a:lnTo>
-                  <a:pt x="423205" y="137508"/>
+                  <a:pt x="402045" y="130632"/>
                 </a:lnTo>
                 <a:lnTo>
-                  <a:pt x="481774" y="184936"/>
+                  <a:pt x="457685" y="175689"/>
                 </a:lnTo>
                 <a:lnTo>
-                  <a:pt x="535064" y="238226"/>
+                  <a:pt x="508311" y="226315"/>
                 </a:lnTo>
                 <a:lnTo>
-                  <a:pt x="582492" y="296795"/>
+                  <a:pt x="553368" y="281955"/>
                 </a:lnTo>
                 <a:lnTo>
-                  <a:pt x="623538" y="360000"/>
+                  <a:pt x="592361" y="342000"/>
                 </a:lnTo>
                 <a:lnTo>
-                  <a:pt x="657753" y="427150"/>
+                  <a:pt x="624865" y="405792"/>
                 </a:lnTo>
                 <a:lnTo>
-                  <a:pt x="684761" y="497508"/>
+                  <a:pt x="650523" y="472632"/>
                 </a:lnTo>
                 <a:lnTo>
-                  <a:pt x="704266" y="570304"/>
+                  <a:pt x="669053" y="541788"/>
                 </a:lnTo>
                 <a:lnTo>
-                  <a:pt x="716056" y="644740"/>
+                  <a:pt x="680253" y="612503"/>
                 </a:lnTo>
                 <a:lnTo>
-                  <a:pt x="720000" y="720000"/>
+                  <a:pt x="684000" y="684000"/>
                 </a:lnTo>
                 <a:lnTo>
-                  <a:pt x="716056" y="795260"/>
+                  <a:pt x="680253" y="755497"/>
                 </a:lnTo>
                 <a:lnTo>
-                  <a:pt x="704266" y="869696"/>
+                  <a:pt x="669053" y="826212"/>
                 </a:lnTo>
                 <a:lnTo>
-                  <a:pt x="684761" y="942492"/>
+                  <a:pt x="650523" y="895368"/>
                 </a:lnTo>
                 <a:lnTo>
-                  <a:pt x="657753" y="1012850"/>
+                  <a:pt x="624865" y="962208"/>
                 </a:lnTo>
                 <a:lnTo>
-                  <a:pt x="623538" y="1080000"/>
+                  <a:pt x="592361" y="1026000"/>
                 </a:lnTo>
                 <a:lnTo>
-                  <a:pt x="582492" y="1143205"/>
+                  <a:pt x="553368" y="1086045"/>
                 </a:lnTo>
                 <a:lnTo>
-                  <a:pt x="535064" y="1201774"/>
+                  <a:pt x="508311" y="1141685"/>
                 </a:lnTo>
                 <a:lnTo>
-                  <a:pt x="481774" y="1255064"/>
+                  <a:pt x="457685" y="1192311"/>
                 </a:lnTo>
                 <a:lnTo>
-                  <a:pt x="423205" y="1302492"/>
+                  <a:pt x="402045" y="1237368"/>
                 </a:lnTo>
                 <a:lnTo>
-                  <a:pt x="360000" y="1343538"/>
+                  <a:pt x="342000" y="1276361"/>
                 </a:lnTo>
                 <a:lnTo>
-                  <a:pt x="292850" y="1377753"/>
+                  <a:pt x="278208" y="1308865"/>
                 </a:lnTo>
                 <a:lnTo>
-                  <a:pt x="222492" y="1404761"/>
+                  <a:pt x="211368" y="1334523"/>
                 </a:lnTo>
                 <a:lnTo>
-                  <a:pt x="149696" y="1424266"/>
+                  <a:pt x="142212" y="1353053"/>
                 </a:lnTo>
                 <a:lnTo>
-                  <a:pt x="75260" y="1436056"/>
+                  <a:pt x="71497" y="1364253"/>
                 </a:lnTo>
                 <a:lnTo>
-                  <a:pt x="0" y="1440000"/>
+                  <a:pt x="0" y="1368000"/>
                 </a:lnTo>
                 <a:close/>
               </a:path>
@@ -3230,14 +3230,72 @@
       </p:sp>
       <p:sp>
         <p:nvSpPr>
-          <p:cNvPr id="3" name="텍스트"/>
+          <p:cNvPr id="3" name="Oval 2"/>
+          <p:cNvSpPr/>
+          <p:nvPr/>
+        </p:nvSpPr>
+        <p:spPr>
+          <a:xfrm>
+            <a:off x="-432000" y="468000"/>
+            <a:ext cx="864000" cy="864000"/>
+          </a:xfrm>
+          <a:prstGeom prst="ellipse">
+            <a:avLst/>
+          </a:prstGeom>
+          <a:noFill/>
+          <a:ln w="4320">
+            <a:solidFill>
+              <a:srgbClr val="FFFFFF"/>
+            </a:solidFill>
+          </a:ln>
+        </p:spPr>
+        <p:txBody>
+          <a:bodyPr rtlCol="0" anchor="ctr"/>
+          <a:lstStyle/>
+          <a:p>
+            <a:pPr algn="ctr"/>
+          </a:p>
+        </p:txBody>
+      </p:sp>
+      <p:sp>
+        <p:nvSpPr>
+          <p:cNvPr id="4" name="Oval 3"/>
+          <p:cNvSpPr/>
+          <p:nvPr/>
+        </p:nvSpPr>
+        <p:spPr>
+          <a:xfrm>
+            <a:off x="-252000" y="648000"/>
+            <a:ext cx="504000" cy="504000"/>
+          </a:xfrm>
+          <a:prstGeom prst="ellipse">
+            <a:avLst/>
+          </a:prstGeom>
+          <a:noFill/>
+          <a:ln w="4320">
+            <a:solidFill>
+              <a:srgbClr val="FFFFFF"/>
+            </a:solidFill>
+          </a:ln>
+        </p:spPr>
+        <p:txBody>
+          <a:bodyPr rtlCol="0" anchor="ctr"/>
+          <a:lstStyle/>
+          <a:p>
+            <a:pPr algn="ctr"/>
+          </a:p>
+        </p:txBody>
+      </p:sp>
+      <p:sp>
+        <p:nvSpPr>
+          <p:cNvPr id="5" name="텍스트"/>
           <p:cNvSpPr txBox="1"/>
           <p:nvPr/>
         </p:nvSpPr>
         <p:spPr>
           <a:xfrm>
-            <a:off x="36000" y="540000"/>
-            <a:ext cx="540000" cy="720000"/>
+            <a:off x="86400" y="612000"/>
+            <a:ext cx="324000" cy="576000"/>
           </a:xfrm>
           <a:prstGeom prst="rect">
             <a:avLst/>
@@ -3252,32 +3310,32 @@
           <a:p>
             <a:pPr algn="ctr">
               <a:lnSpc>
-                <a:spcPts val="4350"/>
+                <a:spcPts val="1450"/>
               </a:lnSpc>
             </a:pPr>
             <a:r>
-              <a:rPr sz="3000" b="1">
+              <a:rPr sz="1000" b="1">
                 <a:solidFill>
                   <a:srgbClr val="FFFFFF"/>
                 </a:solidFill>
                 <a:latin typeface="맑은 고딕"/>
                 <a:ea typeface="맑은 고딕"/>
               </a:rPr>
-              <a:t>맹</a:t>
-            </a:r>
-          </a:p>
-        </p:txBody>
-      </p:sp>
-      <p:sp>
-        <p:nvSpPr>
-          <p:cNvPr id="4" name="텍스트"/>
+              <a:t>회</a:t>
+            </a:r>
+          </a:p>
+        </p:txBody>
+      </p:sp>
+      <p:sp>
+        <p:nvSpPr>
+          <p:cNvPr id="6" name="텍스트"/>
           <p:cNvSpPr txBox="1"/>
           <p:nvPr/>
         </p:nvSpPr>
         <p:spPr>
           <a:xfrm>
-            <a:off x="1116000" y="223200"/>
-            <a:ext cx="1872000" cy="133351"/>
+            <a:off x="1116000" y="252000"/>
+            <a:ext cx="1872000" cy="123826"/>
           </a:xfrm>
           <a:prstGeom prst="rect">
             <a:avLst/>
@@ -3292,11 +3350,11 @@
           <a:p>
             <a:pPr algn="l">
               <a:lnSpc>
-                <a:spcPts val="1015"/>
+                <a:spcPts val="942"/>
               </a:lnSpc>
             </a:pPr>
             <a:r>
-              <a:rPr sz="700" b="1" spc="200">
+              <a:rPr sz="650" b="1" spc="220">
                 <a:solidFill>
                   <a:srgbClr val="A3A9B5"/>
                 </a:solidFill>
@@ -3308,16 +3366,37 @@
           </a:p>
         </p:txBody>
       </p:sp>
-      <p:sp>
-        <p:nvSpPr>
-          <p:cNvPr id="5" name="텍스트"/>
+      <p:cxnSp>
+        <p:nvCxnSpPr>
+          <p:cNvPr id="7" name="Connector 6"/>
+          <p:cNvCxnSpPr/>
+          <p:nvPr/>
+        </p:nvCxnSpPr>
+        <p:spPr>
+          <a:xfrm>
+            <a:off x="1116000" y="424800"/>
+            <a:ext cx="1872000" cy="0"/>
+          </a:xfrm>
+          <a:prstGeom prst="line">
+            <a:avLst/>
+          </a:prstGeom>
+          <a:ln w="3600">
+            <a:solidFill>
+              <a:srgbClr val="2A2F38"/>
+            </a:solidFill>
+          </a:ln>
+        </p:spPr>
+      </p:cxnSp>
+      <p:sp>
+        <p:nvSpPr>
+          <p:cNvPr id="8" name="텍스트"/>
           <p:cNvSpPr txBox="1"/>
           <p:nvPr/>
         </p:nvSpPr>
         <p:spPr>
           <a:xfrm>
-            <a:off x="1116000" y="540000"/>
-            <a:ext cx="1872000" cy="360000"/>
+            <a:off x="1116000" y="648000"/>
+            <a:ext cx="1800000" cy="237600"/>
           </a:xfrm>
           <a:prstGeom prst="rect">
             <a:avLst/>
@@ -3332,11 +3411,11 @@
           <a:p>
             <a:pPr algn="l">
               <a:lnSpc>
-                <a:spcPts val="3190"/>
+                <a:spcPts val="1957"/>
               </a:lnSpc>
             </a:pPr>
             <a:r>
-              <a:rPr sz="2200" b="1">
+              <a:rPr sz="1350" b="1" spc="120">
                 <a:solidFill>
                   <a:srgbClr val="FFFFFF"/>
                 </a:solidFill>
@@ -3350,14 +3429,14 @@
       </p:sp>
       <p:sp>
         <p:nvSpPr>
-          <p:cNvPr id="6" name="텍스트"/>
+          <p:cNvPr id="9" name="텍스트"/>
           <p:cNvSpPr txBox="1"/>
           <p:nvPr/>
         </p:nvSpPr>
         <p:spPr>
           <a:xfrm>
-            <a:off x="1116000" y="943200"/>
-            <a:ext cx="1872000" cy="171451"/>
+            <a:off x="1116000" y="900000"/>
+            <a:ext cx="1800000" cy="133351"/>
           </a:xfrm>
           <a:prstGeom prst="rect">
             <a:avLst/>
@@ -3372,11 +3451,11 @@
           <a:p>
             <a:pPr algn="l">
               <a:lnSpc>
-                <a:spcPts val="1305"/>
+                <a:spcPts val="1015"/>
               </a:lnSpc>
             </a:pPr>
             <a:r>
-              <a:rPr sz="900" b="0">
+              <a:rPr sz="700" b="0" spc="60">
                 <a:solidFill>
                   <a:srgbClr val="A3A9B5"/>
                 </a:solidFill>
@@ -3388,45 +3467,37 @@
           </a:p>
         </p:txBody>
       </p:sp>
-      <p:sp>
-        <p:nvSpPr>
-          <p:cNvPr id="7" name="Rectangle 6"/>
-          <p:cNvSpPr/>
+      <p:cxnSp>
+        <p:nvCxnSpPr>
+          <p:cNvPr id="10" name="Connector 9"/>
+          <p:cNvCxnSpPr/>
           <p:nvPr/>
-        </p:nvSpPr>
-        <p:spPr>
-          <a:xfrm>
-            <a:off x="1116000" y="1195200"/>
-            <a:ext cx="144000" cy="18000"/>
-          </a:xfrm>
-          <a:prstGeom prst="rect">
+        </p:nvCxnSpPr>
+        <p:spPr>
+          <a:xfrm>
+            <a:off x="1116000" y="1267200"/>
+            <a:ext cx="1872000" cy="0"/>
+          </a:xfrm>
+          <a:prstGeom prst="line">
             <a:avLst/>
           </a:prstGeom>
-          <a:solidFill>
-            <a:srgbClr val="6F6FFF"/>
-          </a:solidFill>
-          <a:ln>
-            <a:noFill/>
+          <a:ln w="3600">
+            <a:solidFill>
+              <a:srgbClr val="2A2F38"/>
+            </a:solidFill>
           </a:ln>
         </p:spPr>
-        <p:txBody>
-          <a:bodyPr rtlCol="0" anchor="ctr"/>
-          <a:lstStyle/>
-          <a:p>
-            <a:pPr algn="ctr"/>
-          </a:p>
-        </p:txBody>
-      </p:sp>
-      <p:sp>
-        <p:nvSpPr>
-          <p:cNvPr id="8" name="텍스트"/>
+      </p:cxnSp>
+      <p:sp>
+        <p:nvSpPr>
+          <p:cNvPr id="11" name="텍스트"/>
           <p:cNvSpPr txBox="1"/>
           <p:nvPr/>
         </p:nvSpPr>
         <p:spPr>
           <a:xfrm>
-            <a:off x="1116000" y="1328400"/>
-            <a:ext cx="331200" cy="99061"/>
+            <a:off x="1116000" y="1357200"/>
+            <a:ext cx="331200" cy="91441"/>
           </a:xfrm>
           <a:prstGeom prst="rect">
             <a:avLst/>
@@ -3441,11 +3512,11 @@
           <a:p>
             <a:pPr algn="l">
               <a:lnSpc>
-                <a:spcPts val="754"/>
+                <a:spcPts val="696"/>
               </a:lnSpc>
             </a:pPr>
             <a:r>
-              <a:rPr sz="520" b="1" spc="120">
+              <a:rPr sz="480" b="1" spc="140">
                 <a:solidFill>
                   <a:srgbClr val="A3A9B5"/>
                 </a:solidFill>
@@ -3459,14 +3530,14 @@
       </p:sp>
       <p:sp>
         <p:nvSpPr>
-          <p:cNvPr id="9" name="텍스트"/>
+          <p:cNvPr id="12" name="텍스트"/>
           <p:cNvSpPr txBox="1"/>
           <p:nvPr/>
         </p:nvSpPr>
         <p:spPr>
           <a:xfrm>
-            <a:off x="1447200" y="1317600"/>
-            <a:ext cx="1440000" cy="133351"/>
+            <a:off x="1447200" y="1346400"/>
+            <a:ext cx="1188000" cy="123826"/>
           </a:xfrm>
           <a:prstGeom prst="rect">
             <a:avLst/>
@@ -3481,11 +3552,11 @@
           <a:p>
             <a:pPr algn="l">
               <a:lnSpc>
-                <a:spcPts val="1015"/>
+                <a:spcPts val="942"/>
               </a:lnSpc>
             </a:pPr>
             <a:r>
-              <a:rPr sz="700" b="0">
+              <a:rPr sz="650" b="0">
                 <a:solidFill>
                   <a:srgbClr val="FFFFFF"/>
                 </a:solidFill>
@@ -3499,14 +3570,14 @@
       </p:sp>
       <p:sp>
         <p:nvSpPr>
-          <p:cNvPr id="10" name="텍스트"/>
+          <p:cNvPr id="13" name="텍스트"/>
           <p:cNvSpPr txBox="1"/>
           <p:nvPr/>
         </p:nvSpPr>
         <p:spPr>
           <a:xfrm>
-            <a:off x="1116000" y="1458000"/>
-            <a:ext cx="331200" cy="99061"/>
+            <a:off x="1116000" y="1479600"/>
+            <a:ext cx="331200" cy="91441"/>
           </a:xfrm>
           <a:prstGeom prst="rect">
             <a:avLst/>
@@ -3521,11 +3592,11 @@
           <a:p>
             <a:pPr algn="l">
               <a:lnSpc>
-                <a:spcPts val="754"/>
+                <a:spcPts val="696"/>
               </a:lnSpc>
             </a:pPr>
             <a:r>
-              <a:rPr sz="520" b="1" spc="120">
+              <a:rPr sz="480" b="1" spc="140">
                 <a:solidFill>
                   <a:srgbClr val="A3A9B5"/>
                 </a:solidFill>
@@ -3539,14 +3610,14 @@
       </p:sp>
       <p:sp>
         <p:nvSpPr>
-          <p:cNvPr id="11" name="텍스트"/>
+          <p:cNvPr id="14" name="텍스트"/>
           <p:cNvSpPr txBox="1"/>
           <p:nvPr/>
         </p:nvSpPr>
         <p:spPr>
           <a:xfrm>
-            <a:off x="1447200" y="1447200"/>
-            <a:ext cx="1440000" cy="133351"/>
+            <a:off x="1447200" y="1468800"/>
+            <a:ext cx="1188000" cy="123826"/>
           </a:xfrm>
           <a:prstGeom prst="rect">
             <a:avLst/>
@@ -3561,11 +3632,11 @@
           <a:p>
             <a:pPr algn="l">
               <a:lnSpc>
-                <a:spcPts val="1015"/>
+                <a:spcPts val="942"/>
               </a:lnSpc>
             </a:pPr>
             <a:r>
-              <a:rPr sz="700" b="0">
+              <a:rPr sz="650" b="0">
                 <a:solidFill>
                   <a:srgbClr val="FFFFFF"/>
                 </a:solidFill>
@@ -3579,14 +3650,14 @@
       </p:sp>
       <p:sp>
         <p:nvSpPr>
-          <p:cNvPr id="12" name="텍스트"/>
+          <p:cNvPr id="15" name="텍스트"/>
           <p:cNvSpPr txBox="1"/>
           <p:nvPr/>
         </p:nvSpPr>
         <p:spPr>
           <a:xfrm>
-            <a:off x="1116000" y="1587600"/>
-            <a:ext cx="331200" cy="99061"/>
+            <a:off x="1116000" y="1602000"/>
+            <a:ext cx="331200" cy="91441"/>
           </a:xfrm>
           <a:prstGeom prst="rect">
             <a:avLst/>
@@ -3601,11 +3672,11 @@
           <a:p>
             <a:pPr algn="l">
               <a:lnSpc>
-                <a:spcPts val="754"/>
+                <a:spcPts val="696"/>
               </a:lnSpc>
             </a:pPr>
             <a:r>
-              <a:rPr sz="520" b="1" spc="120">
+              <a:rPr sz="480" b="1" spc="140">
                 <a:solidFill>
                   <a:srgbClr val="A3A9B5"/>
                 </a:solidFill>
@@ -3619,14 +3690,14 @@
       </p:sp>
       <p:sp>
         <p:nvSpPr>
-          <p:cNvPr id="13" name="텍스트"/>
+          <p:cNvPr id="16" name="텍스트"/>
           <p:cNvSpPr txBox="1"/>
           <p:nvPr/>
         </p:nvSpPr>
         <p:spPr>
           <a:xfrm>
-            <a:off x="1447200" y="1576800"/>
-            <a:ext cx="1440000" cy="133351"/>
+            <a:off x="1447200" y="1591200"/>
+            <a:ext cx="1188000" cy="123826"/>
           </a:xfrm>
           <a:prstGeom prst="rect">
             <a:avLst/>
@@ -3641,11 +3712,11 @@
           <a:p>
             <a:pPr algn="l">
               <a:lnSpc>
-                <a:spcPts val="1015"/>
+                <a:spcPts val="942"/>
               </a:lnSpc>
             </a:pPr>
             <a:r>
-              <a:rPr sz="700" b="0">
+              <a:rPr sz="650" b="0">
                 <a:solidFill>
                   <a:srgbClr val="FFFFFF"/>
                 </a:solidFill>
@@ -3685,14 +3756,407 @@
       <p:grpSpPr/>
       <p:sp>
         <p:nvSpPr>
-          <p:cNvPr id="2" name="Rectangle 1"/>
+          <p:cNvPr id="2" name="텍스트"/>
+          <p:cNvSpPr txBox="1"/>
+          <p:nvPr/>
+        </p:nvSpPr>
+        <p:spPr>
+          <a:xfrm>
+            <a:off x="252000" y="252000"/>
+            <a:ext cx="1080000" cy="99061"/>
+          </a:xfrm>
+          <a:prstGeom prst="rect">
+            <a:avLst/>
+          </a:prstGeom>
+          <a:noFill/>
+        </p:spPr>
+        <p:txBody>
+          <a:bodyPr wrap="square" lIns="0" rIns="0" tIns="0" bIns="0" anchor="t">
+            <a:spAutoFit/>
+          </a:bodyPr>
+          <a:lstStyle/>
+          <a:p>
+            <a:pPr algn="l">
+              <a:lnSpc>
+                <a:spcPts val="754"/>
+              </a:lnSpc>
+            </a:pPr>
+            <a:r>
+              <a:rPr sz="520" b="1" spc="240">
+                <a:solidFill>
+                  <a:srgbClr val="DBDBFF"/>
+                </a:solidFill>
+                <a:latin typeface="맑은 고딕"/>
+                <a:ea typeface="맑은 고딕"/>
+              </a:rPr>
+              <a:t>상담 분야</a:t>
+            </a:r>
+          </a:p>
+        </p:txBody>
+      </p:sp>
+      <p:sp>
+        <p:nvSpPr>
+          <p:cNvPr id="3" name="Rectangle 2"/>
           <p:cNvSpPr/>
           <p:nvPr/>
         </p:nvSpPr>
         <p:spPr>
           <a:xfrm>
-            <a:off x="0" y="0"/>
-            <a:ext cx="3240000" cy="1800000"/>
+            <a:off x="252000" y="352800"/>
+            <a:ext cx="108000" cy="14400"/>
+          </a:xfrm>
+          <a:prstGeom prst="rect">
+            <a:avLst/>
+          </a:prstGeom>
+          <a:solidFill>
+            <a:srgbClr val="FFFFFF"/>
+          </a:solidFill>
+          <a:ln>
+            <a:noFill/>
+          </a:ln>
+        </p:spPr>
+        <p:txBody>
+          <a:bodyPr rtlCol="0" anchor="ctr"/>
+          <a:lstStyle/>
+          <a:p>
+            <a:pPr algn="ctr"/>
+          </a:p>
+        </p:txBody>
+      </p:sp>
+      <p:cxnSp>
+        <p:nvCxnSpPr>
+          <p:cNvPr id="4" name="Connector 3"/>
+          <p:cNvCxnSpPr/>
+          <p:nvPr/>
+        </p:nvCxnSpPr>
+        <p:spPr>
+          <a:xfrm>
+            <a:off x="252000" y="453600"/>
+            <a:ext cx="1512000" cy="0"/>
+          </a:xfrm>
+          <a:prstGeom prst="line">
+            <a:avLst/>
+          </a:prstGeom>
+          <a:ln w="3600">
+            <a:solidFill>
+              <a:srgbClr val="9D9DFF"/>
+            </a:solidFill>
+          </a:ln>
+        </p:spPr>
+      </p:cxnSp>
+      <p:sp>
+        <p:nvSpPr>
+          <p:cNvPr id="5" name="텍스트"/>
+          <p:cNvSpPr txBox="1"/>
+          <p:nvPr/>
+        </p:nvSpPr>
+        <p:spPr>
+          <a:xfrm>
+            <a:off x="252000" y="507600"/>
+            <a:ext cx="216000" cy="95251"/>
+          </a:xfrm>
+          <a:prstGeom prst="rect">
+            <a:avLst/>
+          </a:prstGeom>
+          <a:noFill/>
+        </p:spPr>
+        <p:txBody>
+          <a:bodyPr wrap="square" lIns="0" rIns="0" tIns="0" bIns="0" anchor="t">
+            <a:spAutoFit/>
+          </a:bodyPr>
+          <a:lstStyle/>
+          <a:p>
+            <a:pPr algn="l">
+              <a:lnSpc>
+                <a:spcPts val="725"/>
+              </a:lnSpc>
+            </a:pPr>
+            <a:r>
+              <a:rPr sz="500" b="1" spc="100">
+                <a:solidFill>
+                  <a:srgbClr val="DBDBFF"/>
+                </a:solidFill>
+                <a:latin typeface="맑은 고딕"/>
+                <a:ea typeface="맑은 고딕"/>
+              </a:rPr>
+              <a:t>01</a:t>
+            </a:r>
+          </a:p>
+        </p:txBody>
+      </p:sp>
+      <p:sp>
+        <p:nvSpPr>
+          <p:cNvPr id="6" name="텍스트"/>
+          <p:cNvSpPr txBox="1"/>
+          <p:nvPr/>
+        </p:nvSpPr>
+        <p:spPr>
+          <a:xfrm>
+            <a:off x="489600" y="496800"/>
+            <a:ext cx="1260000" cy="133351"/>
+          </a:xfrm>
+          <a:prstGeom prst="rect">
+            <a:avLst/>
+          </a:prstGeom>
+          <a:noFill/>
+        </p:spPr>
+        <p:txBody>
+          <a:bodyPr wrap="square" lIns="0" rIns="0" tIns="0" bIns="0" anchor="t">
+            <a:spAutoFit/>
+          </a:bodyPr>
+          <a:lstStyle/>
+          <a:p>
+            <a:pPr algn="l">
+              <a:lnSpc>
+                <a:spcPts val="1015"/>
+              </a:lnSpc>
+            </a:pPr>
+            <a:r>
+              <a:rPr sz="700" b="0">
+                <a:solidFill>
+                  <a:srgbClr val="FFFFFF"/>
+                </a:solidFill>
+                <a:latin typeface="맑은 고딕"/>
+                <a:ea typeface="맑은 고딕"/>
+              </a:rPr>
+              <a:t>보험 상담</a:t>
+            </a:r>
+          </a:p>
+        </p:txBody>
+      </p:sp>
+      <p:cxnSp>
+        <p:nvCxnSpPr>
+          <p:cNvPr id="7" name="Connector 6"/>
+          <p:cNvCxnSpPr/>
+          <p:nvPr/>
+        </p:nvCxnSpPr>
+        <p:spPr>
+          <a:xfrm>
+            <a:off x="252000" y="640800"/>
+            <a:ext cx="1512000" cy="0"/>
+          </a:xfrm>
+          <a:prstGeom prst="line">
+            <a:avLst/>
+          </a:prstGeom>
+          <a:ln w="3600">
+            <a:solidFill>
+              <a:srgbClr val="9D9DFF"/>
+            </a:solidFill>
+          </a:ln>
+        </p:spPr>
+      </p:cxnSp>
+      <p:sp>
+        <p:nvSpPr>
+          <p:cNvPr id="8" name="텍스트"/>
+          <p:cNvSpPr txBox="1"/>
+          <p:nvPr/>
+        </p:nvSpPr>
+        <p:spPr>
+          <a:xfrm>
+            <a:off x="252000" y="694800"/>
+            <a:ext cx="216000" cy="95251"/>
+          </a:xfrm>
+          <a:prstGeom prst="rect">
+            <a:avLst/>
+          </a:prstGeom>
+          <a:noFill/>
+        </p:spPr>
+        <p:txBody>
+          <a:bodyPr wrap="square" lIns="0" rIns="0" tIns="0" bIns="0" anchor="t">
+            <a:spAutoFit/>
+          </a:bodyPr>
+          <a:lstStyle/>
+          <a:p>
+            <a:pPr algn="l">
+              <a:lnSpc>
+                <a:spcPts val="725"/>
+              </a:lnSpc>
+            </a:pPr>
+            <a:r>
+              <a:rPr sz="500" b="1" spc="100">
+                <a:solidFill>
+                  <a:srgbClr val="DBDBFF"/>
+                </a:solidFill>
+                <a:latin typeface="맑은 고딕"/>
+                <a:ea typeface="맑은 고딕"/>
+              </a:rPr>
+              <a:t>02</a:t>
+            </a:r>
+          </a:p>
+        </p:txBody>
+      </p:sp>
+      <p:sp>
+        <p:nvSpPr>
+          <p:cNvPr id="9" name="텍스트"/>
+          <p:cNvSpPr txBox="1"/>
+          <p:nvPr/>
+        </p:nvSpPr>
+        <p:spPr>
+          <a:xfrm>
+            <a:off x="489600" y="684000"/>
+            <a:ext cx="1260000" cy="133351"/>
+          </a:xfrm>
+          <a:prstGeom prst="rect">
+            <a:avLst/>
+          </a:prstGeom>
+          <a:noFill/>
+        </p:spPr>
+        <p:txBody>
+          <a:bodyPr wrap="square" lIns="0" rIns="0" tIns="0" bIns="0" anchor="t">
+            <a:spAutoFit/>
+          </a:bodyPr>
+          <a:lstStyle/>
+          <a:p>
+            <a:pPr algn="l">
+              <a:lnSpc>
+                <a:spcPts val="1015"/>
+              </a:lnSpc>
+            </a:pPr>
+            <a:r>
+              <a:rPr sz="700" b="0">
+                <a:solidFill>
+                  <a:srgbClr val="FFFFFF"/>
+                </a:solidFill>
+                <a:latin typeface="맑은 고딕"/>
+                <a:ea typeface="맑은 고딕"/>
+              </a:rPr>
+              <a:t>세무 상담</a:t>
+            </a:r>
+          </a:p>
+        </p:txBody>
+      </p:sp>
+      <p:cxnSp>
+        <p:nvCxnSpPr>
+          <p:cNvPr id="10" name="Connector 9"/>
+          <p:cNvCxnSpPr/>
+          <p:nvPr/>
+        </p:nvCxnSpPr>
+        <p:spPr>
+          <a:xfrm>
+            <a:off x="252000" y="828000"/>
+            <a:ext cx="1512000" cy="0"/>
+          </a:xfrm>
+          <a:prstGeom prst="line">
+            <a:avLst/>
+          </a:prstGeom>
+          <a:ln w="3600">
+            <a:solidFill>
+              <a:srgbClr val="9D9DFF"/>
+            </a:solidFill>
+          </a:ln>
+        </p:spPr>
+      </p:cxnSp>
+      <p:sp>
+        <p:nvSpPr>
+          <p:cNvPr id="11" name="텍스트"/>
+          <p:cNvSpPr txBox="1"/>
+          <p:nvPr/>
+        </p:nvSpPr>
+        <p:spPr>
+          <a:xfrm>
+            <a:off x="252000" y="882000"/>
+            <a:ext cx="216000" cy="95251"/>
+          </a:xfrm>
+          <a:prstGeom prst="rect">
+            <a:avLst/>
+          </a:prstGeom>
+          <a:noFill/>
+        </p:spPr>
+        <p:txBody>
+          <a:bodyPr wrap="square" lIns="0" rIns="0" tIns="0" bIns="0" anchor="t">
+            <a:spAutoFit/>
+          </a:bodyPr>
+          <a:lstStyle/>
+          <a:p>
+            <a:pPr algn="l">
+              <a:lnSpc>
+                <a:spcPts val="725"/>
+              </a:lnSpc>
+            </a:pPr>
+            <a:r>
+              <a:rPr sz="500" b="1" spc="100">
+                <a:solidFill>
+                  <a:srgbClr val="DBDBFF"/>
+                </a:solidFill>
+                <a:latin typeface="맑은 고딕"/>
+                <a:ea typeface="맑은 고딕"/>
+              </a:rPr>
+              <a:t>03</a:t>
+            </a:r>
+          </a:p>
+        </p:txBody>
+      </p:sp>
+      <p:sp>
+        <p:nvSpPr>
+          <p:cNvPr id="12" name="텍스트"/>
+          <p:cNvSpPr txBox="1"/>
+          <p:nvPr/>
+        </p:nvSpPr>
+        <p:spPr>
+          <a:xfrm>
+            <a:off x="489600" y="871200"/>
+            <a:ext cx="1260000" cy="133351"/>
+          </a:xfrm>
+          <a:prstGeom prst="rect">
+            <a:avLst/>
+          </a:prstGeom>
+          <a:noFill/>
+        </p:spPr>
+        <p:txBody>
+          <a:bodyPr wrap="square" lIns="0" rIns="0" tIns="0" bIns="0" anchor="t">
+            <a:spAutoFit/>
+          </a:bodyPr>
+          <a:lstStyle/>
+          <a:p>
+            <a:pPr algn="l">
+              <a:lnSpc>
+                <a:spcPts val="1015"/>
+              </a:lnSpc>
+            </a:pPr>
+            <a:r>
+              <a:rPr sz="700" b="0">
+                <a:solidFill>
+                  <a:srgbClr val="FFFFFF"/>
+                </a:solidFill>
+                <a:latin typeface="맑은 고딕"/>
+                <a:ea typeface="맑은 고딕"/>
+              </a:rPr>
+              <a:t>사업자 상담</a:t>
+            </a:r>
+          </a:p>
+        </p:txBody>
+      </p:sp>
+      <p:cxnSp>
+        <p:nvCxnSpPr>
+          <p:cNvPr id="13" name="Connector 12"/>
+          <p:cNvCxnSpPr/>
+          <p:nvPr/>
+        </p:nvCxnSpPr>
+        <p:spPr>
+          <a:xfrm>
+            <a:off x="252000" y="1015200"/>
+            <a:ext cx="1512000" cy="0"/>
+          </a:xfrm>
+          <a:prstGeom prst="line">
+            <a:avLst/>
+          </a:prstGeom>
+          <a:ln w="3600">
+            <a:solidFill>
+              <a:srgbClr val="9D9DFF"/>
+            </a:solidFill>
+          </a:ln>
+        </p:spPr>
+      </p:cxnSp>
+      <p:sp>
+        <p:nvSpPr>
+          <p:cNvPr id="14" name="Rectangle 13"/>
+          <p:cNvSpPr/>
+          <p:nvPr/>
+        </p:nvSpPr>
+        <p:spPr>
+          <a:xfrm>
+            <a:off x="2088000" y="252000"/>
+            <a:ext cx="900000" cy="1296000"/>
           </a:xfrm>
           <a:prstGeom prst="rect">
             <a:avLst/>
@@ -3714,130 +4178,14 @@
       </p:sp>
       <p:sp>
         <p:nvSpPr>
-          <p:cNvPr id="3" name="Freeform 2"/>
-          <p:cNvSpPr/>
-          <p:nvPr/>
-        </p:nvSpPr>
-        <p:spPr>
-          <a:xfrm>
-            <a:off x="2412000" y="972000"/>
-            <a:ext cx="828000" cy="828000"/>
-          </a:xfrm>
-          <a:custGeom>
-            <a:avLst/>
-            <a:gdLst/>
-            <a:ahLst/>
-            <a:cxnLst/>
-            <a:rect l="l" t="t" r="r" b="b"/>
-            <a:pathLst>
-              <a:path w="828000" h="828000">
-                <a:moveTo>
-                  <a:pt x="828000" y="828000"/>
-                </a:moveTo>
-                <a:lnTo>
-                  <a:pt x="0" y="828000"/>
-                </a:lnTo>
-                <a:lnTo>
-                  <a:pt x="1773" y="773846"/>
-                </a:lnTo>
-                <a:lnTo>
-                  <a:pt x="7084" y="719924"/>
-                </a:lnTo>
-                <a:lnTo>
-                  <a:pt x="15910" y="666465"/>
-                </a:lnTo>
-                <a:lnTo>
-                  <a:pt x="28213" y="613698"/>
-                </a:lnTo>
-                <a:lnTo>
-                  <a:pt x="43942" y="561848"/>
-                </a:lnTo>
-                <a:lnTo>
-                  <a:pt x="63028" y="511138"/>
-                </a:lnTo>
-                <a:lnTo>
-                  <a:pt x="85389" y="461785"/>
-                </a:lnTo>
-                <a:lnTo>
-                  <a:pt x="110931" y="414000"/>
-                </a:lnTo>
-                <a:lnTo>
-                  <a:pt x="139543" y="367988"/>
-                </a:lnTo>
-                <a:lnTo>
-                  <a:pt x="171103" y="323946"/>
-                </a:lnTo>
-                <a:lnTo>
-                  <a:pt x="205477" y="282062"/>
-                </a:lnTo>
-                <a:lnTo>
-                  <a:pt x="242516" y="242516"/>
-                </a:lnTo>
-                <a:lnTo>
-                  <a:pt x="282062" y="205477"/>
-                </a:lnTo>
-                <a:lnTo>
-                  <a:pt x="323946" y="171103"/>
-                </a:lnTo>
-                <a:lnTo>
-                  <a:pt x="367988" y="139543"/>
-                </a:lnTo>
-                <a:lnTo>
-                  <a:pt x="414000" y="110931"/>
-                </a:lnTo>
-                <a:lnTo>
-                  <a:pt x="461785" y="85389"/>
-                </a:lnTo>
-                <a:lnTo>
-                  <a:pt x="511138" y="63028"/>
-                </a:lnTo>
-                <a:lnTo>
-                  <a:pt x="561848" y="43942"/>
-                </a:lnTo>
-                <a:lnTo>
-                  <a:pt x="613698" y="28213"/>
-                </a:lnTo>
-                <a:lnTo>
-                  <a:pt x="666465" y="15910"/>
-                </a:lnTo>
-                <a:lnTo>
-                  <a:pt x="719924" y="7084"/>
-                </a:lnTo>
-                <a:lnTo>
-                  <a:pt x="773846" y="1773"/>
-                </a:lnTo>
-                <a:lnTo>
-                  <a:pt x="828000" y="0"/>
-                </a:lnTo>
-                <a:close/>
-              </a:path>
-            </a:pathLst>
-          </a:custGeom>
-          <a:solidFill>
-            <a:srgbClr val="9999FF"/>
-          </a:solidFill>
-          <a:ln>
-            <a:noFill/>
-          </a:ln>
-        </p:spPr>
-        <p:txBody>
-          <a:bodyPr rtlCol="0" anchor="ctr"/>
-          <a:lstStyle/>
-          <a:p>
-            <a:pPr algn="ctr"/>
-          </a:p>
-        </p:txBody>
-      </p:sp>
-      <p:sp>
-        <p:nvSpPr>
-          <p:cNvPr id="4" name="텍스트"/>
+          <p:cNvPr id="15" name="텍스트"/>
           <p:cNvSpPr txBox="1"/>
           <p:nvPr/>
         </p:nvSpPr>
         <p:spPr>
           <a:xfrm>
-            <a:off x="252000" y="432000"/>
-            <a:ext cx="2304000" cy="720000"/>
+            <a:off x="2196000" y="360000"/>
+            <a:ext cx="684000" cy="95251"/>
           </a:xfrm>
           <a:prstGeom prst="rect">
             <a:avLst/>
@@ -3852,32 +4200,95 @@
           <a:p>
             <a:pPr algn="l">
               <a:lnSpc>
-                <a:spcPts val="1884"/>
+                <a:spcPts val="725"/>
               </a:lnSpc>
             </a:pPr>
             <a:r>
-              <a:rPr sz="1300" b="1">
+              <a:rPr sz="500" b="1" spc="240">
+                <a:solidFill>
+                  <a:srgbClr val="FFFFFF">
+                    <a:alpha val="75000"/>
+                  </a:srgbClr>
+                </a:solidFill>
+                <a:latin typeface="맑은 고딕"/>
+                <a:ea typeface="맑은 고딕"/>
+              </a:rPr>
+              <a:t>INFO</a:t>
+            </a:r>
+          </a:p>
+        </p:txBody>
+      </p:sp>
+      <p:sp>
+        <p:nvSpPr>
+          <p:cNvPr id="16" name="텍스트"/>
+          <p:cNvSpPr txBox="1"/>
+          <p:nvPr/>
+        </p:nvSpPr>
+        <p:spPr>
+          <a:xfrm>
+            <a:off x="2196000" y="504000"/>
+            <a:ext cx="684000" cy="121921"/>
+          </a:xfrm>
+          <a:prstGeom prst="rect">
+            <a:avLst/>
+          </a:prstGeom>
+          <a:noFill/>
+        </p:spPr>
+        <p:txBody>
+          <a:bodyPr wrap="square" lIns="0" rIns="0" tIns="0" bIns="0" anchor="t">
+            <a:spAutoFit/>
+          </a:bodyPr>
+          <a:lstStyle/>
+          <a:p>
+            <a:pPr algn="l">
+              <a:lnSpc>
+                <a:spcPts val="927"/>
+              </a:lnSpc>
+            </a:pPr>
+            <a:r>
+              <a:rPr sz="640" b="1">
                 <a:solidFill>
                   <a:srgbClr val="FFFFFF"/>
                 </a:solidFill>
                 <a:latin typeface="맑은 고딕"/>
                 <a:ea typeface="맑은 고딕"/>
               </a:rPr>
-              <a:t>삶의 계획표를 함께 그려요</a:t>
-            </a:r>
-          </a:p>
-        </p:txBody>
-      </p:sp>
-      <p:sp>
-        <p:nvSpPr>
-          <p:cNvPr id="5" name="텍스트"/>
+              <a:t>방문 · 전화 상담</a:t>
+            </a:r>
+          </a:p>
+        </p:txBody>
+      </p:sp>
+      <p:cxnSp>
+        <p:nvCxnSpPr>
+          <p:cNvPr id="17" name="Connector 16"/>
+          <p:cNvCxnSpPr/>
+          <p:nvPr/>
+        </p:nvCxnSpPr>
+        <p:spPr>
+          <a:xfrm>
+            <a:off x="2196000" y="770400"/>
+            <a:ext cx="684000" cy="0"/>
+          </a:xfrm>
+          <a:prstGeom prst="line">
+            <a:avLst/>
+          </a:prstGeom>
+          <a:ln w="3600">
+            <a:solidFill>
+              <a:srgbClr val="FFFFFF"/>
+            </a:solidFill>
+          </a:ln>
+        </p:spPr>
+      </p:cxnSp>
+      <p:sp>
+        <p:nvSpPr>
+          <p:cNvPr id="18" name="텍스트"/>
           <p:cNvSpPr txBox="1"/>
           <p:nvPr/>
         </p:nvSpPr>
         <p:spPr>
           <a:xfrm>
-            <a:off x="252000" y="1476000"/>
-            <a:ext cx="1800000" cy="133351"/>
+            <a:off x="2196000" y="849600"/>
+            <a:ext cx="684000" cy="91441"/>
           </a:xfrm>
           <a:prstGeom prst="rect">
             <a:avLst/>
@@ -3892,11 +4303,93 @@
           <a:p>
             <a:pPr algn="l">
               <a:lnSpc>
-                <a:spcPts val="1015"/>
+                <a:spcPts val="696"/>
               </a:lnSpc>
             </a:pPr>
             <a:r>
-              <a:rPr sz="700" b="1" spc="200">
+              <a:rPr sz="480" b="1" spc="140">
+                <a:solidFill>
+                  <a:srgbClr val="FFFFFF">
+                    <a:alpha val="75000"/>
+                  </a:srgbClr>
+                </a:solidFill>
+                <a:latin typeface="맑은 고딕"/>
+                <a:ea typeface="맑은 고딕"/>
+              </a:rPr>
+              <a:t>WEB</a:t>
+            </a:r>
+          </a:p>
+        </p:txBody>
+      </p:sp>
+      <p:sp>
+        <p:nvSpPr>
+          <p:cNvPr id="19" name="텍스트"/>
+          <p:cNvSpPr txBox="1"/>
+          <p:nvPr/>
+        </p:nvSpPr>
+        <p:spPr>
+          <a:xfrm>
+            <a:off x="2196000" y="957600"/>
+            <a:ext cx="684000" cy="121921"/>
+          </a:xfrm>
+          <a:prstGeom prst="rect">
+            <a:avLst/>
+          </a:prstGeom>
+          <a:noFill/>
+        </p:spPr>
+        <p:txBody>
+          <a:bodyPr wrap="square" lIns="0" rIns="0" tIns="0" bIns="0" anchor="t">
+            <a:spAutoFit/>
+          </a:bodyPr>
+          <a:lstStyle/>
+          <a:p>
+            <a:pPr algn="l">
+              <a:lnSpc>
+                <a:spcPts val="927"/>
+              </a:lnSpc>
+            </a:pPr>
+            <a:r>
+              <a:rPr sz="640" b="1">
+                <a:solidFill>
+                  <a:srgbClr val="FFFFFF"/>
+                </a:solidFill>
+                <a:latin typeface="맑은 고딕"/>
+                <a:ea typeface="맑은 고딕"/>
+              </a:rPr>
+              <a:t>www.example.com</a:t>
+            </a:r>
+          </a:p>
+        </p:txBody>
+      </p:sp>
+      <p:sp>
+        <p:nvSpPr>
+          <p:cNvPr id="20" name="텍스트"/>
+          <p:cNvSpPr txBox="1"/>
+          <p:nvPr/>
+        </p:nvSpPr>
+        <p:spPr>
+          <a:xfrm>
+            <a:off x="2196000" y="1368000"/>
+            <a:ext cx="720000" cy="106681"/>
+          </a:xfrm>
+          <a:prstGeom prst="rect">
+            <a:avLst/>
+          </a:prstGeom>
+          <a:noFill/>
+        </p:spPr>
+        <p:txBody>
+          <a:bodyPr wrap="square" lIns="0" rIns="0" tIns="0" bIns="0" anchor="t">
+            <a:spAutoFit/>
+          </a:bodyPr>
+          <a:lstStyle/>
+          <a:p>
+            <a:pPr algn="l">
+              <a:lnSpc>
+                <a:spcPts val="811"/>
+              </a:lnSpc>
+            </a:pPr>
+            <a:r>
+              <a:rPr sz="560" b="1" spc="80">
                 <a:solidFill>
                   <a:srgbClr val="FFFFFF"/>
                 </a:solidFill>
